--- a/fence.pptx
+++ b/fence.pptx
@@ -8,6 +8,7 @@
     <p:sldId id="261" r:id="rId2"/>
     <p:sldId id="262" r:id="rId3"/>
     <p:sldId id="263" r:id="rId4"/>
+    <p:sldId id="264" r:id="rId5"/>
   </p:sldIdLst>
   <p:sldSz cx="12192000" cy="6858000"/>
   <p:notesSz cx="6858000" cy="9144000"/>
@@ -260,7 +261,7 @@
           <a:lstStyle/>
           <a:p>
             <a:fld id="{5F491023-0B0A-7041-9F06-D25A50EF063B}" type="datetimeFigureOut">
-              <a:t>10/15/22</a:t>
+              <a:t>10/24/22</a:t>
             </a:fld>
             <a:endParaRPr lang="en-US"/>
           </a:p>
@@ -456,7 +457,7 @@
           <a:lstStyle/>
           <a:p>
             <a:fld id="{5F491023-0B0A-7041-9F06-D25A50EF063B}" type="datetimeFigureOut">
-              <a:t>10/15/22</a:t>
+              <a:t>10/24/22</a:t>
             </a:fld>
             <a:endParaRPr lang="en-US"/>
           </a:p>
@@ -662,7 +663,7 @@
           <a:lstStyle/>
           <a:p>
             <a:fld id="{5F491023-0B0A-7041-9F06-D25A50EF063B}" type="datetimeFigureOut">
-              <a:t>10/15/22</a:t>
+              <a:t>10/24/22</a:t>
             </a:fld>
             <a:endParaRPr lang="en-US"/>
           </a:p>
@@ -858,7 +859,7 @@
           <a:lstStyle/>
           <a:p>
             <a:fld id="{5F491023-0B0A-7041-9F06-D25A50EF063B}" type="datetimeFigureOut">
-              <a:t>10/15/22</a:t>
+              <a:t>10/24/22</a:t>
             </a:fld>
             <a:endParaRPr lang="en-US"/>
           </a:p>
@@ -1131,7 +1132,7 @@
           <a:lstStyle/>
           <a:p>
             <a:fld id="{5F491023-0B0A-7041-9F06-D25A50EF063B}" type="datetimeFigureOut">
-              <a:t>10/15/22</a:t>
+              <a:t>10/24/22</a:t>
             </a:fld>
             <a:endParaRPr lang="en-US"/>
           </a:p>
@@ -1394,7 +1395,7 @@
           <a:lstStyle/>
           <a:p>
             <a:fld id="{5F491023-0B0A-7041-9F06-D25A50EF063B}" type="datetimeFigureOut">
-              <a:t>10/15/22</a:t>
+              <a:t>10/24/22</a:t>
             </a:fld>
             <a:endParaRPr lang="en-US"/>
           </a:p>
@@ -1804,7 +1805,7 @@
           <a:lstStyle/>
           <a:p>
             <a:fld id="{5F491023-0B0A-7041-9F06-D25A50EF063B}" type="datetimeFigureOut">
-              <a:t>10/15/22</a:t>
+              <a:t>10/24/22</a:t>
             </a:fld>
             <a:endParaRPr lang="en-US"/>
           </a:p>
@@ -1943,7 +1944,7 @@
           <a:lstStyle/>
           <a:p>
             <a:fld id="{5F491023-0B0A-7041-9F06-D25A50EF063B}" type="datetimeFigureOut">
-              <a:t>10/15/22</a:t>
+              <a:t>10/24/22</a:t>
             </a:fld>
             <a:endParaRPr lang="en-US"/>
           </a:p>
@@ -2054,7 +2055,7 @@
           <a:lstStyle/>
           <a:p>
             <a:fld id="{5F491023-0B0A-7041-9F06-D25A50EF063B}" type="datetimeFigureOut">
-              <a:t>10/15/22</a:t>
+              <a:t>10/24/22</a:t>
             </a:fld>
             <a:endParaRPr lang="en-US"/>
           </a:p>
@@ -2363,7 +2364,7 @@
           <a:lstStyle/>
           <a:p>
             <a:fld id="{5F491023-0B0A-7041-9F06-D25A50EF063B}" type="datetimeFigureOut">
-              <a:t>10/15/22</a:t>
+              <a:t>10/24/22</a:t>
             </a:fld>
             <a:endParaRPr lang="en-US"/>
           </a:p>
@@ -2649,7 +2650,7 @@
           <a:lstStyle/>
           <a:p>
             <a:fld id="{5F491023-0B0A-7041-9F06-D25A50EF063B}" type="datetimeFigureOut">
-              <a:t>10/15/22</a:t>
+              <a:t>10/24/22</a:t>
             </a:fld>
             <a:endParaRPr lang="en-US"/>
           </a:p>
@@ -2888,7 +2889,7 @@
           </a:lstStyle>
           <a:p>
             <a:fld id="{5F491023-0B0A-7041-9F06-D25A50EF063B}" type="datetimeFigureOut">
-              <a:t>10/15/22</a:t>
+              <a:t>10/24/22</a:t>
             </a:fld>
             <a:endParaRPr lang="en-US"/>
           </a:p>
@@ -3941,6 +3942,801 @@
 </p:sld>
 </file>
 
+<file path=ppt/slides/slide4.xml><?xml version="1.0" encoding="utf-8"?>
+<p:sld xmlns:a="http://schemas.openxmlformats.org/drawingml/2006/main" xmlns:r="http://schemas.openxmlformats.org/officeDocument/2006/relationships" xmlns:p="http://schemas.openxmlformats.org/presentationml/2006/main">
+  <p:cSld>
+    <p:spTree>
+      <p:nvGrpSpPr>
+        <p:cNvPr id="1" name=""/>
+        <p:cNvGrpSpPr/>
+        <p:nvPr/>
+      </p:nvGrpSpPr>
+      <p:grpSpPr>
+        <a:xfrm>
+          <a:off x="0" y="0"/>
+          <a:ext cx="0" cy="0"/>
+          <a:chOff x="0" y="0"/>
+          <a:chExt cx="0" cy="0"/>
+        </a:xfrm>
+      </p:grpSpPr>
+      <p:pic>
+        <p:nvPicPr>
+          <p:cNvPr id="2" name="Picture 1">
+            <a:extLst>
+              <a:ext uri="{FF2B5EF4-FFF2-40B4-BE49-F238E27FC236}">
+                <a16:creationId xmlns:a16="http://schemas.microsoft.com/office/drawing/2014/main" id="{21274D0F-C1D7-9BB1-A062-46F7B149113C}"/>
+              </a:ext>
+            </a:extLst>
+          </p:cNvPr>
+          <p:cNvPicPr>
+            <a:picLocks noChangeAspect="1"/>
+          </p:cNvPicPr>
+          <p:nvPr/>
+        </p:nvPicPr>
+        <p:blipFill>
+          <a:blip r:embed="rId2" cstate="email">
+            <a:extLst>
+              <a:ext uri="{28A0092B-C50C-407E-A947-70E740481C1C}">
+                <a14:useLocalDpi xmlns:a14="http://schemas.microsoft.com/office/drawing/2010/main"/>
+              </a:ext>
+            </a:extLst>
+          </a:blip>
+          <a:stretch>
+            <a:fillRect/>
+          </a:stretch>
+        </p:blipFill>
+        <p:spPr>
+          <a:xfrm>
+            <a:off x="280308" y="887576"/>
+            <a:ext cx="1668413" cy="1455313"/>
+          </a:xfrm>
+          <a:prstGeom prst="rect">
+            <a:avLst/>
+          </a:prstGeom>
+        </p:spPr>
+      </p:pic>
+      <p:sp>
+        <p:nvSpPr>
+          <p:cNvPr id="3" name="TextBox 2">
+            <a:extLst>
+              <a:ext uri="{FF2B5EF4-FFF2-40B4-BE49-F238E27FC236}">
+                <a16:creationId xmlns:a16="http://schemas.microsoft.com/office/drawing/2014/main" id="{5C55336F-A875-79C0-0D8D-76CF99ADA76F}"/>
+              </a:ext>
+            </a:extLst>
+          </p:cNvPr>
+          <p:cNvSpPr txBox="1"/>
+          <p:nvPr/>
+        </p:nvSpPr>
+        <p:spPr>
+          <a:xfrm>
+            <a:off x="106530" y="2617303"/>
+            <a:ext cx="2455368" cy="3016210"/>
+          </a:xfrm>
+          <a:prstGeom prst="rect">
+            <a:avLst/>
+          </a:prstGeom>
+          <a:solidFill>
+            <a:schemeClr val="accent4">
+              <a:lumMod val="20000"/>
+              <a:lumOff val="80000"/>
+            </a:schemeClr>
+          </a:solidFill>
+          <a:ln>
+            <a:solidFill>
+              <a:srgbClr val="FF0000"/>
+            </a:solidFill>
+          </a:ln>
+        </p:spPr>
+        <p:txBody>
+          <a:bodyPr wrap="square" rtlCol="0">
+            <a:spAutoFit/>
+          </a:bodyPr>
+          <a:lstStyle/>
+          <a:p>
+            <a:r>
+              <a:rPr lang="en-US" sz="1400"/>
+              <a:t>Digging Bar: </a:t>
+            </a:r>
+          </a:p>
+          <a:p>
+            <a:r>
+              <a:rPr lang="en-US" sz="1400"/>
+              <a:t>Length: 72"</a:t>
+            </a:r>
+          </a:p>
+          <a:p>
+            <a:r>
+              <a:rPr lang="en-US" sz="1400"/>
+              <a:t>Width: 1" (or 2.5")</a:t>
+            </a:r>
+          </a:p>
+          <a:p>
+            <a:r>
+              <a:rPr lang="en-US" sz="1400"/>
+              <a:t>Weight &gt; 30 lbs</a:t>
+            </a:r>
+          </a:p>
+          <a:p>
+            <a:r>
+              <a:rPr lang="en-US" sz="1400"/>
+              <a:t>Has a sharp pencil pointed end and a chisel edge. </a:t>
+            </a:r>
+          </a:p>
+          <a:p>
+            <a:endParaRPr lang="en-US" sz="1400"/>
+          </a:p>
+          <a:p>
+            <a:r>
+              <a:rPr lang="en-US" sz="1400"/>
+              <a:t>Good for cutting and carving stone, concrete, metal and wood.</a:t>
+            </a:r>
+          </a:p>
+          <a:p>
+            <a:endParaRPr lang="en-US" sz="1400"/>
+          </a:p>
+          <a:p>
+            <a:r>
+              <a:rPr lang="en-US" sz="1200">
+                <a:hlinkClick r:id="rId3"/>
+              </a:rPr>
+              <a:t>https://www.amazon.com/WESTWARD-Digging-Bar-Pencil-Point/dp/B07CSD7P4Z/</a:t>
+            </a:r>
+            <a:endParaRPr lang="en-US" sz="1200"/>
+          </a:p>
+        </p:txBody>
+      </p:sp>
+      <p:sp>
+        <p:nvSpPr>
+          <p:cNvPr id="4" name="TextBox 3">
+            <a:extLst>
+              <a:ext uri="{FF2B5EF4-FFF2-40B4-BE49-F238E27FC236}">
+                <a16:creationId xmlns:a16="http://schemas.microsoft.com/office/drawing/2014/main" id="{5C8100EB-9050-07CB-672E-6C300B4C03D0}"/>
+              </a:ext>
+            </a:extLst>
+          </p:cNvPr>
+          <p:cNvSpPr txBox="1"/>
+          <p:nvPr/>
+        </p:nvSpPr>
+        <p:spPr>
+          <a:xfrm>
+            <a:off x="108857" y="87086"/>
+            <a:ext cx="5407523" cy="523220"/>
+          </a:xfrm>
+          <a:prstGeom prst="rect">
+            <a:avLst/>
+          </a:prstGeom>
+          <a:noFill/>
+        </p:spPr>
+        <p:txBody>
+          <a:bodyPr wrap="square" rtlCol="0">
+            <a:spAutoFit/>
+          </a:bodyPr>
+          <a:lstStyle/>
+          <a:p>
+            <a:r>
+              <a:rPr lang="en-US" sz="2800" b="1"/>
+              <a:t>Digging Bar, Crow Bar,  Truper Bap</a:t>
+            </a:r>
+          </a:p>
+        </p:txBody>
+      </p:sp>
+      <p:sp>
+        <p:nvSpPr>
+          <p:cNvPr id="5" name="TextBox 4">
+            <a:extLst>
+              <a:ext uri="{FF2B5EF4-FFF2-40B4-BE49-F238E27FC236}">
+                <a16:creationId xmlns:a16="http://schemas.microsoft.com/office/drawing/2014/main" id="{8A318916-FA42-BF49-2E4E-866BD9B1A1BC}"/>
+              </a:ext>
+            </a:extLst>
+          </p:cNvPr>
+          <p:cNvSpPr txBox="1"/>
+          <p:nvPr/>
+        </p:nvSpPr>
+        <p:spPr>
+          <a:xfrm>
+            <a:off x="2741377" y="2621494"/>
+            <a:ext cx="1980525" cy="1415772"/>
+          </a:xfrm>
+          <a:prstGeom prst="rect">
+            <a:avLst/>
+          </a:prstGeom>
+          <a:solidFill>
+            <a:schemeClr val="accent4">
+              <a:lumMod val="20000"/>
+              <a:lumOff val="80000"/>
+            </a:schemeClr>
+          </a:solidFill>
+          <a:ln>
+            <a:solidFill>
+              <a:srgbClr val="FF0000"/>
+            </a:solidFill>
+          </a:ln>
+        </p:spPr>
+        <p:txBody>
+          <a:bodyPr wrap="square" rtlCol="0">
+            <a:spAutoFit/>
+          </a:bodyPr>
+          <a:lstStyle/>
+          <a:p>
+            <a:r>
+              <a:rPr lang="en-US" sz="1400"/>
+              <a:t>TRUPER BAP-150 San Angelo Bars 1"x 60"(150cm) 13Lb (6 Kg)</a:t>
+            </a:r>
+          </a:p>
+          <a:p>
+            <a:endParaRPr lang="en-US" sz="1400"/>
+          </a:p>
+          <a:p>
+            <a:r>
+              <a:rPr lang="en-US" sz="1000">
+                <a:hlinkClick r:id="rId4"/>
+              </a:rPr>
+              <a:t>https://www.amazon.com/TRUPER-BAP-150-Angelo-Bars-150cm/dp/B00UY1RLKC/</a:t>
+            </a:r>
+            <a:endParaRPr lang="en-US" sz="1000"/>
+          </a:p>
+        </p:txBody>
+      </p:sp>
+      <p:pic>
+        <p:nvPicPr>
+          <p:cNvPr id="6" name="Picture 5">
+            <a:extLst>
+              <a:ext uri="{FF2B5EF4-FFF2-40B4-BE49-F238E27FC236}">
+                <a16:creationId xmlns:a16="http://schemas.microsoft.com/office/drawing/2014/main" id="{CADD3EB7-4C85-F028-42BD-CA594445148C}"/>
+              </a:ext>
+            </a:extLst>
+          </p:cNvPr>
+          <p:cNvPicPr>
+            <a:picLocks noChangeAspect="1"/>
+          </p:cNvPicPr>
+          <p:nvPr/>
+        </p:nvPicPr>
+        <p:blipFill>
+          <a:blip r:embed="rId5" cstate="email">
+            <a:extLst>
+              <a:ext uri="{28A0092B-C50C-407E-A947-70E740481C1C}">
+                <a14:useLocalDpi xmlns:a14="http://schemas.microsoft.com/office/drawing/2010/main"/>
+              </a:ext>
+            </a:extLst>
+          </a:blip>
+          <a:stretch>
+            <a:fillRect/>
+          </a:stretch>
+        </p:blipFill>
+        <p:spPr>
+          <a:xfrm>
+            <a:off x="2954480" y="750368"/>
+            <a:ext cx="1554318" cy="1729727"/>
+          </a:xfrm>
+          <a:prstGeom prst="rect">
+            <a:avLst/>
+          </a:prstGeom>
+        </p:spPr>
+      </p:pic>
+      <p:sp>
+        <p:nvSpPr>
+          <p:cNvPr id="7" name="TextBox 6">
+            <a:extLst>
+              <a:ext uri="{FF2B5EF4-FFF2-40B4-BE49-F238E27FC236}">
+                <a16:creationId xmlns:a16="http://schemas.microsoft.com/office/drawing/2014/main" id="{03FB3FD6-EB76-8A4D-682A-D9A189479244}"/>
+              </a:ext>
+            </a:extLst>
+          </p:cNvPr>
+          <p:cNvSpPr txBox="1"/>
+          <p:nvPr/>
+        </p:nvSpPr>
+        <p:spPr>
+          <a:xfrm>
+            <a:off x="4817193" y="2617303"/>
+            <a:ext cx="1749529" cy="523220"/>
+          </a:xfrm>
+          <a:prstGeom prst="rect">
+            <a:avLst/>
+          </a:prstGeom>
+          <a:solidFill>
+            <a:schemeClr val="accent4">
+              <a:lumMod val="20000"/>
+              <a:lumOff val="80000"/>
+            </a:schemeClr>
+          </a:solidFill>
+          <a:ln>
+            <a:solidFill>
+              <a:srgbClr val="FF0000"/>
+            </a:solidFill>
+          </a:ln>
+        </p:spPr>
+        <p:txBody>
+          <a:bodyPr wrap="square" rtlCol="0">
+            <a:spAutoFit/>
+          </a:bodyPr>
+          <a:lstStyle/>
+          <a:p>
+            <a:pPr algn="l"/>
+            <a:r>
+              <a:rPr lang="en-US" sz="1400" b="0" i="0">
+                <a:solidFill>
+                  <a:srgbClr val="0F1111"/>
+                </a:solidFill>
+                <a:effectLst/>
+                <a:latin typeface="Amazon Ember"/>
+              </a:rPr>
+              <a:t>True Temper 60" </a:t>
+            </a:r>
+          </a:p>
+          <a:p>
+            <a:pPr algn="l"/>
+            <a:r>
+              <a:rPr lang="en-US" sz="1400" b="0" i="0">
+                <a:solidFill>
+                  <a:srgbClr val="0F1111"/>
+                </a:solidFill>
+                <a:effectLst/>
+                <a:latin typeface="Amazon Ember"/>
+              </a:rPr>
+              <a:t>Pinch Point Crow Bar</a:t>
+            </a:r>
+          </a:p>
+        </p:txBody>
+      </p:sp>
+      <p:pic>
+        <p:nvPicPr>
+          <p:cNvPr id="1026" name="Picture 2" descr="True Temper 60&quot; Pinch Point Crow Bar">
+            <a:extLst>
+              <a:ext uri="{FF2B5EF4-FFF2-40B4-BE49-F238E27FC236}">
+                <a16:creationId xmlns:a16="http://schemas.microsoft.com/office/drawing/2014/main" id="{C4D46248-82DA-CDBD-36FA-CBE0B459AE62}"/>
+              </a:ext>
+            </a:extLst>
+          </p:cNvPr>
+          <p:cNvPicPr>
+            <a:picLocks noChangeAspect="1" noChangeArrowheads="1"/>
+          </p:cNvPicPr>
+          <p:nvPr/>
+        </p:nvPicPr>
+        <p:blipFill>
+          <a:blip r:embed="rId6" cstate="email">
+            <a:extLst>
+              <a:ext uri="{28A0092B-C50C-407E-A947-70E740481C1C}">
+                <a14:useLocalDpi xmlns:a14="http://schemas.microsoft.com/office/drawing/2010/main"/>
+              </a:ext>
+            </a:extLst>
+          </a:blip>
+          <a:srcRect/>
+          <a:stretch>
+            <a:fillRect/>
+          </a:stretch>
+        </p:blipFill>
+        <p:spPr bwMode="auto">
+          <a:xfrm>
+            <a:off x="4817193" y="944516"/>
+            <a:ext cx="1398373" cy="1398373"/>
+          </a:xfrm>
+          <a:prstGeom prst="rect">
+            <a:avLst/>
+          </a:prstGeom>
+          <a:noFill/>
+          <a:extLst>
+            <a:ext uri="{909E8E84-426E-40DD-AFC4-6F175D3DCCD1}">
+              <a14:hiddenFill xmlns:a14="http://schemas.microsoft.com/office/drawing/2010/main">
+                <a:solidFill>
+                  <a:srgbClr val="FFFFFF"/>
+                </a:solidFill>
+              </a14:hiddenFill>
+            </a:ext>
+          </a:extLst>
+        </p:spPr>
+      </p:pic>
+      <p:pic>
+        <p:nvPicPr>
+          <p:cNvPr id="8" name="Picture 7">
+            <a:extLst>
+              <a:ext uri="{FF2B5EF4-FFF2-40B4-BE49-F238E27FC236}">
+                <a16:creationId xmlns:a16="http://schemas.microsoft.com/office/drawing/2014/main" id="{07B37254-3EA6-0F23-6146-7008A805F7FD}"/>
+              </a:ext>
+            </a:extLst>
+          </p:cNvPr>
+          <p:cNvPicPr>
+            <a:picLocks noChangeAspect="1"/>
+          </p:cNvPicPr>
+          <p:nvPr/>
+        </p:nvPicPr>
+        <p:blipFill>
+          <a:blip r:embed="rId7" cstate="email">
+            <a:extLst>
+              <a:ext uri="{28A0092B-C50C-407E-A947-70E740481C1C}">
+                <a14:useLocalDpi xmlns:a14="http://schemas.microsoft.com/office/drawing/2010/main"/>
+              </a:ext>
+            </a:extLst>
+          </a:blip>
+          <a:stretch>
+            <a:fillRect/>
+          </a:stretch>
+        </p:blipFill>
+        <p:spPr>
+          <a:xfrm>
+            <a:off x="10303633" y="244602"/>
+            <a:ext cx="1749529" cy="2409728"/>
+          </a:xfrm>
+          <a:prstGeom prst="rect">
+            <a:avLst/>
+          </a:prstGeom>
+        </p:spPr>
+      </p:pic>
+      <p:pic>
+        <p:nvPicPr>
+          <p:cNvPr id="1028" name="Picture 4" descr="A digging bar">
+            <a:extLst>
+              <a:ext uri="{FF2B5EF4-FFF2-40B4-BE49-F238E27FC236}">
+                <a16:creationId xmlns:a16="http://schemas.microsoft.com/office/drawing/2014/main" id="{100D58AC-FF51-EC67-CB4E-870A6EB4DFCC}"/>
+              </a:ext>
+            </a:extLst>
+          </p:cNvPr>
+          <p:cNvPicPr>
+            <a:picLocks noChangeAspect="1" noChangeArrowheads="1"/>
+          </p:cNvPicPr>
+          <p:nvPr/>
+        </p:nvPicPr>
+        <p:blipFill>
+          <a:blip r:embed="rId8" cstate="email">
+            <a:extLst>
+              <a:ext uri="{28A0092B-C50C-407E-A947-70E740481C1C}">
+                <a14:useLocalDpi xmlns:a14="http://schemas.microsoft.com/office/drawing/2010/main"/>
+              </a:ext>
+            </a:extLst>
+          </a:blip>
+          <a:srcRect/>
+          <a:stretch>
+            <a:fillRect/>
+          </a:stretch>
+        </p:blipFill>
+        <p:spPr bwMode="auto">
+          <a:xfrm>
+            <a:off x="8686746" y="244602"/>
+            <a:ext cx="1451635" cy="2580685"/>
+          </a:xfrm>
+          <a:prstGeom prst="rect">
+            <a:avLst/>
+          </a:prstGeom>
+          <a:noFill/>
+          <a:extLst>
+            <a:ext uri="{909E8E84-426E-40DD-AFC4-6F175D3DCCD1}">
+              <a14:hiddenFill xmlns:a14="http://schemas.microsoft.com/office/drawing/2010/main">
+                <a:solidFill>
+                  <a:srgbClr val="FFFFFF"/>
+                </a:solidFill>
+              </a14:hiddenFill>
+            </a:ext>
+          </a:extLst>
+        </p:spPr>
+      </p:pic>
+      <p:sp>
+        <p:nvSpPr>
+          <p:cNvPr id="9" name="TextBox 8">
+            <a:extLst>
+              <a:ext uri="{FF2B5EF4-FFF2-40B4-BE49-F238E27FC236}">
+                <a16:creationId xmlns:a16="http://schemas.microsoft.com/office/drawing/2014/main" id="{0EB4DF0D-54B9-D2A0-6AE2-98AF3D43A890}"/>
+              </a:ext>
+            </a:extLst>
+          </p:cNvPr>
+          <p:cNvSpPr txBox="1"/>
+          <p:nvPr/>
+        </p:nvSpPr>
+        <p:spPr>
+          <a:xfrm>
+            <a:off x="8942920" y="2986634"/>
+            <a:ext cx="1015405" cy="307777"/>
+          </a:xfrm>
+          <a:prstGeom prst="rect">
+            <a:avLst/>
+          </a:prstGeom>
+          <a:solidFill>
+            <a:schemeClr val="accent4">
+              <a:lumMod val="20000"/>
+              <a:lumOff val="80000"/>
+            </a:schemeClr>
+          </a:solidFill>
+          <a:ln>
+            <a:solidFill>
+              <a:srgbClr val="FF0000"/>
+            </a:solidFill>
+          </a:ln>
+        </p:spPr>
+        <p:txBody>
+          <a:bodyPr wrap="square" rtlCol="0">
+            <a:spAutoFit/>
+          </a:bodyPr>
+          <a:lstStyle/>
+          <a:p>
+            <a:pPr algn="l"/>
+            <a:r>
+              <a:rPr lang="en-US" sz="1400" b="0" i="0">
+                <a:solidFill>
+                  <a:srgbClr val="0F1111"/>
+                </a:solidFill>
+                <a:effectLst/>
+                <a:latin typeface="Amazon Ember"/>
+              </a:rPr>
+              <a:t>Digging Bar</a:t>
+            </a:r>
+          </a:p>
+        </p:txBody>
+      </p:sp>
+      <p:pic>
+        <p:nvPicPr>
+          <p:cNvPr id="10" name="Picture 9">
+            <a:extLst>
+              <a:ext uri="{FF2B5EF4-FFF2-40B4-BE49-F238E27FC236}">
+                <a16:creationId xmlns:a16="http://schemas.microsoft.com/office/drawing/2014/main" id="{90555114-2C2B-174C-3933-0E7E70755CF8}"/>
+              </a:ext>
+            </a:extLst>
+          </p:cNvPr>
+          <p:cNvPicPr>
+            <a:picLocks noChangeAspect="1"/>
+          </p:cNvPicPr>
+          <p:nvPr/>
+        </p:nvPicPr>
+        <p:blipFill>
+          <a:blip r:embed="rId9" cstate="email">
+            <a:extLst>
+              <a:ext uri="{28A0092B-C50C-407E-A947-70E740481C1C}">
+                <a14:useLocalDpi xmlns:a14="http://schemas.microsoft.com/office/drawing/2010/main"/>
+              </a:ext>
+            </a:extLst>
+          </a:blip>
+          <a:stretch>
+            <a:fillRect/>
+          </a:stretch>
+        </p:blipFill>
+        <p:spPr>
+          <a:xfrm>
+            <a:off x="5691957" y="3691766"/>
+            <a:ext cx="2387600" cy="2374900"/>
+          </a:xfrm>
+          <a:prstGeom prst="rect">
+            <a:avLst/>
+          </a:prstGeom>
+        </p:spPr>
+      </p:pic>
+      <p:sp>
+        <p:nvSpPr>
+          <p:cNvPr id="11" name="TextBox 10">
+            <a:extLst>
+              <a:ext uri="{FF2B5EF4-FFF2-40B4-BE49-F238E27FC236}">
+                <a16:creationId xmlns:a16="http://schemas.microsoft.com/office/drawing/2014/main" id="{39D86B67-B0E1-5A8C-895F-5810717D19CD}"/>
+              </a:ext>
+            </a:extLst>
+          </p:cNvPr>
+          <p:cNvSpPr txBox="1"/>
+          <p:nvPr/>
+        </p:nvSpPr>
+        <p:spPr>
+          <a:xfrm>
+            <a:off x="5899917" y="6134568"/>
+            <a:ext cx="1715086" cy="307777"/>
+          </a:xfrm>
+          <a:prstGeom prst="rect">
+            <a:avLst/>
+          </a:prstGeom>
+          <a:solidFill>
+            <a:schemeClr val="accent4">
+              <a:lumMod val="20000"/>
+              <a:lumOff val="80000"/>
+            </a:schemeClr>
+          </a:solidFill>
+          <a:ln>
+            <a:solidFill>
+              <a:srgbClr val="FF0000"/>
+            </a:solidFill>
+          </a:ln>
+        </p:spPr>
+        <p:txBody>
+          <a:bodyPr wrap="square" rtlCol="0">
+            <a:spAutoFit/>
+          </a:bodyPr>
+          <a:lstStyle/>
+          <a:p>
+            <a:pPr algn="ctr"/>
+            <a:r>
+              <a:rPr lang="en-US" sz="1400" b="0" i="0">
+                <a:solidFill>
+                  <a:srgbClr val="0F1111"/>
+                </a:solidFill>
+                <a:effectLst/>
+                <a:latin typeface="Amazon Ember"/>
+              </a:rPr>
+              <a:t>Jackhammer</a:t>
+            </a:r>
+          </a:p>
+        </p:txBody>
+      </p:sp>
+      <p:pic>
+        <p:nvPicPr>
+          <p:cNvPr id="12" name="Picture 11">
+            <a:extLst>
+              <a:ext uri="{FF2B5EF4-FFF2-40B4-BE49-F238E27FC236}">
+                <a16:creationId xmlns:a16="http://schemas.microsoft.com/office/drawing/2014/main" id="{C5C27521-68DA-D526-27BA-72DE74D26262}"/>
+              </a:ext>
+            </a:extLst>
+          </p:cNvPr>
+          <p:cNvPicPr>
+            <a:picLocks noChangeAspect="1"/>
+          </p:cNvPicPr>
+          <p:nvPr/>
+        </p:nvPicPr>
+        <p:blipFill>
+          <a:blip r:embed="rId10" cstate="email">
+            <a:extLst>
+              <a:ext uri="{28A0092B-C50C-407E-A947-70E740481C1C}">
+                <a14:useLocalDpi xmlns:a14="http://schemas.microsoft.com/office/drawing/2010/main"/>
+              </a:ext>
+            </a:extLst>
+          </a:blip>
+          <a:stretch>
+            <a:fillRect/>
+          </a:stretch>
+        </p:blipFill>
+        <p:spPr>
+          <a:xfrm>
+            <a:off x="9317015" y="3329380"/>
+            <a:ext cx="1980526" cy="1196399"/>
+          </a:xfrm>
+          <a:prstGeom prst="rect">
+            <a:avLst/>
+          </a:prstGeom>
+        </p:spPr>
+      </p:pic>
+      <p:sp>
+        <p:nvSpPr>
+          <p:cNvPr id="13" name="TextBox 12">
+            <a:extLst>
+              <a:ext uri="{FF2B5EF4-FFF2-40B4-BE49-F238E27FC236}">
+                <a16:creationId xmlns:a16="http://schemas.microsoft.com/office/drawing/2014/main" id="{6FA37154-7548-5D56-F511-0EDF9526A7BE}"/>
+              </a:ext>
+            </a:extLst>
+          </p:cNvPr>
+          <p:cNvSpPr txBox="1"/>
+          <p:nvPr/>
+        </p:nvSpPr>
+        <p:spPr>
+          <a:xfrm>
+            <a:off x="10338076" y="4203671"/>
+            <a:ext cx="1715086" cy="307777"/>
+          </a:xfrm>
+          <a:prstGeom prst="rect">
+            <a:avLst/>
+          </a:prstGeom>
+          <a:solidFill>
+            <a:schemeClr val="accent4">
+              <a:lumMod val="20000"/>
+              <a:lumOff val="80000"/>
+            </a:schemeClr>
+          </a:solidFill>
+          <a:ln>
+            <a:solidFill>
+              <a:srgbClr val="FF0000"/>
+            </a:solidFill>
+          </a:ln>
+        </p:spPr>
+        <p:txBody>
+          <a:bodyPr wrap="square" rtlCol="0">
+            <a:spAutoFit/>
+          </a:bodyPr>
+          <a:lstStyle/>
+          <a:p>
+            <a:pPr algn="ctr"/>
+            <a:r>
+              <a:rPr lang="en-US" sz="1400" b="0" i="0">
+                <a:solidFill>
+                  <a:srgbClr val="0F1111"/>
+                </a:solidFill>
+                <a:effectLst/>
+                <a:latin typeface="Amazon Ember"/>
+              </a:rPr>
+              <a:t>Pry Bar</a:t>
+            </a:r>
+          </a:p>
+        </p:txBody>
+      </p:sp>
+      <p:pic>
+        <p:nvPicPr>
+          <p:cNvPr id="14" name="Picture 13">
+            <a:extLst>
+              <a:ext uri="{FF2B5EF4-FFF2-40B4-BE49-F238E27FC236}">
+                <a16:creationId xmlns:a16="http://schemas.microsoft.com/office/drawing/2014/main" id="{ED714F42-3911-F138-E41E-8422843D64C8}"/>
+              </a:ext>
+            </a:extLst>
+          </p:cNvPr>
+          <p:cNvPicPr>
+            <a:picLocks noChangeAspect="1"/>
+          </p:cNvPicPr>
+          <p:nvPr/>
+        </p:nvPicPr>
+        <p:blipFill>
+          <a:blip r:embed="rId11" cstate="email">
+            <a:extLst>
+              <a:ext uri="{28A0092B-C50C-407E-A947-70E740481C1C}">
+                <a14:useLocalDpi xmlns:a14="http://schemas.microsoft.com/office/drawing/2010/main"/>
+              </a:ext>
+            </a:extLst>
+          </a:blip>
+          <a:stretch>
+            <a:fillRect/>
+          </a:stretch>
+        </p:blipFill>
+        <p:spPr>
+          <a:xfrm>
+            <a:off x="8872370" y="4838879"/>
+            <a:ext cx="3213100" cy="723900"/>
+          </a:xfrm>
+          <a:prstGeom prst="rect">
+            <a:avLst/>
+          </a:prstGeom>
+        </p:spPr>
+      </p:pic>
+      <p:sp>
+        <p:nvSpPr>
+          <p:cNvPr id="15" name="TextBox 14">
+            <a:extLst>
+              <a:ext uri="{FF2B5EF4-FFF2-40B4-BE49-F238E27FC236}">
+                <a16:creationId xmlns:a16="http://schemas.microsoft.com/office/drawing/2014/main" id="{80F035AF-DBA6-0DC9-2831-37B44FC474E9}"/>
+              </a:ext>
+            </a:extLst>
+          </p:cNvPr>
+          <p:cNvSpPr txBox="1"/>
+          <p:nvPr/>
+        </p:nvSpPr>
+        <p:spPr>
+          <a:xfrm>
+            <a:off x="9618548" y="5717678"/>
+            <a:ext cx="1715086" cy="307777"/>
+          </a:xfrm>
+          <a:prstGeom prst="rect">
+            <a:avLst/>
+          </a:prstGeom>
+          <a:solidFill>
+            <a:schemeClr val="accent4">
+              <a:lumMod val="20000"/>
+              <a:lumOff val="80000"/>
+            </a:schemeClr>
+          </a:solidFill>
+          <a:ln>
+            <a:solidFill>
+              <a:srgbClr val="FF0000"/>
+            </a:solidFill>
+          </a:ln>
+        </p:spPr>
+        <p:txBody>
+          <a:bodyPr wrap="square" rtlCol="0">
+            <a:spAutoFit/>
+          </a:bodyPr>
+          <a:lstStyle/>
+          <a:p>
+            <a:pPr algn="ctr"/>
+            <a:r>
+              <a:rPr lang="en-US" sz="1400" b="0" i="0">
+                <a:solidFill>
+                  <a:srgbClr val="0F1111"/>
+                </a:solidFill>
+                <a:effectLst/>
+                <a:latin typeface="Amazon Ember"/>
+              </a:rPr>
+              <a:t>Wrecking Bar</a:t>
+            </a:r>
+          </a:p>
+        </p:txBody>
+      </p:sp>
+    </p:spTree>
+    <p:extLst>
+      <p:ext uri="{BB962C8B-B14F-4D97-AF65-F5344CB8AC3E}">
+        <p14:creationId xmlns:p14="http://schemas.microsoft.com/office/powerpoint/2010/main" val="1133658212"/>
+      </p:ext>
+    </p:extLst>
+  </p:cSld>
+  <p:clrMapOvr>
+    <a:masterClrMapping/>
+  </p:clrMapOvr>
+</p:sld>
+</file>
+
 <file path=ppt/theme/theme1.xml><?xml version="1.0" encoding="utf-8"?>
 <a:theme xmlns:a="http://schemas.openxmlformats.org/drawingml/2006/main" name="Office Theme">
   <a:themeElements>
